--- a/classes/parte-8-blue-team-deteccion-y-soc/199-ingenieria-de-deteccion-como-disciplina/clase-199-presentacion.pptx
+++ b/classes/parte-8-blue-team-deteccion-y-soc/199-ingenieria-de-deteccion-como-disciplina/clase-199-presentacion.pptx
@@ -17,6 +17,11 @@
     <p:sldId id="265" r:id="rId16"/>
     <p:sldId id="266" r:id="rId17"/>
     <p:sldId id="267" r:id="rId18"/>
+    <p:sldId id="268" r:id="rId19"/>
+    <p:sldId id="269" r:id="rId20"/>
+    <p:sldId id="270" r:id="rId21"/>
+    <p:sldId id="271" r:id="rId22"/>
+    <p:sldId id="272" r:id="rId23"/>
   </p:sldIdLst>
   <p:sldSz cx="9144000" cy="6858000" type="screen4x3"/>
   <p:notesSz cx="6858000" cy="9144000"/>
@@ -3198,7 +3203,7 @@
                   <a:srgbClr val="0B3D2E"/>
                 </a:solidFill>
               </a:rPr>
-              <a:t>⚠️ Errores comunes</a:t>
+              <a:t>🧰 Herramientas y preparación</a:t>
             </a:r>
           </a:p>
         </p:txBody>
@@ -3236,67 +3241,82 @@
                   <a:srgbClr val="22282E"/>
                 </a:solidFill>
               </a:rPr>
-              <a:t>•  Regla rota llega a producción — Sin CI de validación; añade sigma check al pipeline</a:t>
-            </a:r>
-          </a:p>
-          <a:p>
-            <a:pPr>
-              <a:spcAft>
-                <a:spcPts val="600"/>
-              </a:spcAft>
-            </a:pPr>
-            <a:r>
-              <a:rPr sz="1500">
-                <a:solidFill>
-                  <a:srgbClr val="22282E"/>
-                </a:solidFill>
-              </a:rPr>
-              <a:t>•  Nadie sabe qué hace una alerta — Falta documentación/respuesta; exige metadatos por regla</a:t>
-            </a:r>
-          </a:p>
-          <a:p>
-            <a:pPr>
-              <a:spcAft>
-                <a:spcPts val="600"/>
-              </a:spcAft>
-            </a:pPr>
-            <a:r>
-              <a:rPr sz="1500">
-                <a:solidFill>
-                  <a:srgbClr val="22282E"/>
-                </a:solidFill>
-              </a:rPr>
-              <a:t>•  Cobertura "teórica" que no dispara — No validada; prueba con Atomic Red Team</a:t>
-            </a:r>
-          </a:p>
-          <a:p>
-            <a:pPr>
-              <a:spcAft>
-                <a:spcPts val="600"/>
-              </a:spcAft>
-            </a:pPr>
-            <a:r>
-              <a:rPr sz="1500">
-                <a:solidFill>
-                  <a:srgbClr val="22282E"/>
-                </a:solidFill>
-              </a:rPr>
-              <a:t>•  Reglas ruidosas acumuladas — Deuda de detección sin gestionar; revisa y retira periódicamente</a:t>
-            </a:r>
-          </a:p>
-          <a:p>
-            <a:pPr>
-              <a:spcAft>
-                <a:spcPts val="600"/>
-              </a:spcAft>
-            </a:pPr>
-            <a:r>
-              <a:rPr sz="1500">
-                <a:solidFill>
-                  <a:srgbClr val="22282E"/>
-                </a:solidFill>
-              </a:rPr>
-              <a:t>•  Cambios sin trazabilidad — Detecciones fuera de control de versiones; muévelas a Git</a:t>
+              <a:t>•  Un repositorio Git para tus reglas Sigma (clase 186) como fuente de verdad.</a:t>
+            </a:r>
+          </a:p>
+          <a:p>
+            <a:pPr>
+              <a:spcAft>
+                <a:spcPts val="600"/>
+              </a:spcAft>
+            </a:pPr>
+            <a:r>
+              <a:rPr sz="1500">
+                <a:solidFill>
+                  <a:srgbClr val="22282E"/>
+                </a:solidFill>
+              </a:rPr>
+              <a:t>•  sigma-cli/pySigma en un pipeline de CI (GitHub Actions/GitLab CI) para validar y convertir.</a:t>
+            </a:r>
+          </a:p>
+          <a:p>
+            <a:pPr>
+              <a:spcAft>
+                <a:spcPts val="600"/>
+              </a:spcAft>
+            </a:pPr>
+            <a:r>
+              <a:rPr sz="1500">
+                <a:solidFill>
+                  <a:srgbClr val="22282E"/>
+                </a:solidFill>
+              </a:rPr>
+              <a:t>•  Atomic Red Team para validar que cada detección dispara ante su técnica.</a:t>
+            </a:r>
+          </a:p>
+          <a:p>
+            <a:pPr>
+              <a:spcAft>
+                <a:spcPts val="600"/>
+              </a:spcAft>
+            </a:pPr>
+            <a:r>
+              <a:rPr sz="1500">
+                <a:solidFill>
+                  <a:srgbClr val="22282E"/>
+                </a:solidFill>
+              </a:rPr>
+              <a:t>•  Tu SIEM de laboratorio como destino de despliegue.</a:t>
+            </a:r>
+          </a:p>
+          <a:p>
+            <a:pPr>
+              <a:spcAft>
+                <a:spcPts val="600"/>
+              </a:spcAft>
+            </a:pPr>
+            <a:r>
+              <a:rPr sz="1500">
+                <a:solidFill>
+                  <a:srgbClr val="22282E"/>
+                </a:solidFill>
+              </a:rPr>
+              <a:t>•  Una plantilla de metadatos por detección.</a:t>
+            </a:r>
+          </a:p>
+          <a:p>
+            <a:pPr>
+              <a:spcAft>
+                <a:spcPts val="600"/>
+              </a:spcAft>
+            </a:pPr>
+            <a:r>
+              <a:rPr sz="1500">
+                <a:solidFill>
+                  <a:srgbClr val="22282E"/>
+                </a:solidFill>
+              </a:rPr>
+              <a:t>•  Las validaciones con Atomic Red Team se ejecutan solo en tu laboratorio propio y aislado.</a:t>
             </a:r>
           </a:p>
         </p:txBody>
@@ -3347,7 +3367,7 @@
                   <a:srgbClr val="0B3D2E"/>
                 </a:solidFill>
               </a:rPr>
-              <a:t>❓ Preguntas frecuentes</a:t>
+              <a:t>🧪 Laboratorio guiado — Un pipeline de detección como código</a:t>
             </a:r>
           </a:p>
         </p:txBody>
@@ -3385,82 +3405,97 @@
                   <a:srgbClr val="22282E"/>
                 </a:solidFill>
               </a:rPr>
-              <a:t>•  ❓ ¿Por qué tratar detecciones como software?</a:t>
-            </a:r>
-          </a:p>
-          <a:p>
-            <a:pPr>
-              <a:spcAft>
-                <a:spcPts val="600"/>
-              </a:spcAft>
-            </a:pPr>
-            <a:r>
-              <a:rPr sz="1500">
-                <a:solidFill>
-                  <a:srgbClr val="22282E"/>
-                </a:solidFill>
-              </a:rPr>
-              <a:t>•  Porque comparten problemas: calidad, regresiones, mantenimiento y colaboración. Aplicar control de versiones, revisión y CI evita que tu cobertura se degrade sin que nadie lo note.</a:t>
-            </a:r>
-          </a:p>
-          <a:p>
-            <a:pPr>
-              <a:spcAft>
-                <a:spcPts val="600"/>
-              </a:spcAft>
-            </a:pPr>
-            <a:r>
-              <a:rPr sz="1500">
-                <a:solidFill>
-                  <a:srgbClr val="22282E"/>
-                </a:solidFill>
-              </a:rPr>
-              <a:t>•  ❓ ¿Toda detección debe validarse con Atomic?</a:t>
-            </a:r>
-          </a:p>
-          <a:p>
-            <a:pPr>
-              <a:spcAft>
-                <a:spcPts val="600"/>
-              </a:spcAft>
-            </a:pPr>
-            <a:r>
-              <a:rPr sz="1500">
-                <a:solidFill>
-                  <a:srgbClr val="22282E"/>
-                </a:solidFill>
-              </a:rPr>
-              <a:t>•  Siempre que exista un test atómico aplicable, sí: la cobertura teórica engaña. Validar demuestra que la regla dispara ante la técnica real y no solo en el papel.</a:t>
-            </a:r>
-          </a:p>
-          <a:p>
-            <a:pPr>
-              <a:spcAft>
-                <a:spcPts val="600"/>
-              </a:spcAft>
-            </a:pPr>
-            <a:r>
-              <a:rPr sz="1500">
-                <a:solidFill>
-                  <a:srgbClr val="22282E"/>
-                </a:solidFill>
-              </a:rPr>
-              <a:t>•  ❓ ¿Cuándo retiro una detección?</a:t>
-            </a:r>
-          </a:p>
-          <a:p>
-            <a:pPr>
-              <a:spcAft>
-                <a:spcPts val="600"/>
-              </a:spcAft>
-            </a:pPr>
-            <a:r>
-              <a:rPr sz="1500">
-                <a:solidFill>
-                  <a:srgbClr val="22282E"/>
-                </a:solidFill>
-              </a:rPr>
-              <a:t>•  Cuando su ratio de falsos positivos es insostenible, la técnica ya no aplica, o otra regla la cubre mejor. Documenta la decisión: retirar también es ingeniería.</a:t>
+              <a:t>•  Estructura el repo. Crea detections/ con tus reglas Sigma y una plantilla de metadatos (título, ATT&amp;CK, fuente de datos, falsos positivos, respuesta).</a:t>
+            </a:r>
+          </a:p>
+          <a:p>
+            <a:pPr>
+              <a:spcAft>
+                <a:spcPts val="600"/>
+              </a:spcAft>
+            </a:pPr>
+            <a:r>
+              <a:rPr sz="1500">
+                <a:solidFill>
+                  <a:srgbClr val="22282E"/>
+                </a:solidFill>
+              </a:rPr>
+              <a:t>•  Añade validación de sintaxis. Un job de CI que corra sigma check sobre todas las reglas al hacer push.</a:t>
+            </a:r>
+          </a:p>
+          <a:p>
+            <a:pPr>
+              <a:spcAft>
+                <a:spcPts val="600"/>
+              </a:spcAft>
+            </a:pPr>
+            <a:r>
+              <a:rPr sz="1500">
+                <a:solidFill>
+                  <a:srgbClr val="22282E"/>
+                </a:solidFill>
+              </a:rPr>
+              <a:t>•  Convierte automáticamente. Otro paso que compile cada regla a tu backend (sigma convert) y falle si alguna no compila.</a:t>
+            </a:r>
+          </a:p>
+          <a:p>
+            <a:pPr>
+              <a:spcAft>
+                <a:spcPts val="600"/>
+              </a:spcAft>
+            </a:pPr>
+            <a:r>
+              <a:rPr sz="1500">
+                <a:solidFill>
+                  <a:srgbClr val="22282E"/>
+                </a:solidFill>
+              </a:rPr>
+              <a:t>•  Escribe una detección nueva. Por ejemplo, ejecución de certutil descargando un archivo (T1105).</a:t>
+            </a:r>
+          </a:p>
+          <a:p>
+            <a:pPr>
+              <a:spcAft>
+                <a:spcPts val="600"/>
+              </a:spcAft>
+            </a:pPr>
+            <a:r>
+              <a:rPr sz="1500">
+                <a:solidFill>
+                  <a:srgbClr val="22282E"/>
+                </a:solidFill>
+              </a:rPr>
+              <a:t>•  Valida con Atomic. Ejecuta el test atómico correspondiente en tu laboratorio y confirma que la regla dispara en el SIEM.</a:t>
+            </a:r>
+          </a:p>
+          <a:p>
+            <a:pPr>
+              <a:spcAft>
+                <a:spcPts val="600"/>
+              </a:spcAft>
+            </a:pPr>
+            <a:r>
+              <a:rPr sz="1500">
+                <a:solidFill>
+                  <a:srgbClr val="22282E"/>
+                </a:solidFill>
+              </a:rPr>
+              <a:t>•  Documenta la respuesta. Añade a la regla qué debe hacer el analista cuando dispare (triaje, contención).</a:t>
+            </a:r>
+          </a:p>
+          <a:p>
+            <a:pPr>
+              <a:spcAft>
+                <a:spcPts val="600"/>
+              </a:spcAft>
+            </a:pPr>
+            <a:r>
+              <a:rPr sz="1500">
+                <a:solidFill>
+                  <a:srgbClr val="22282E"/>
+                </a:solidFill>
+              </a:rPr>
+              <a:t>•  Gestiona el ciclo. Marca una regla vieja y ruidosa para retiro; registra la decisión en el historial de Git.</a:t>
             </a:r>
           </a:p>
         </p:txBody>
@@ -3511,7 +3546,7 @@
                   <a:srgbClr val="0B3D2E"/>
                 </a:solidFill>
               </a:rPr>
-              <a:t>🔗 Referencias</a:t>
+              <a:t>✍️ Ejercicios</a:t>
             </a:r>
           </a:p>
         </p:txBody>
@@ -3549,71 +3584,712 @@
                   <a:srgbClr val="22282E"/>
                 </a:solidFill>
               </a:rPr>
-              <a:t>•  SigmaHQ y Sigma Specification — &lt;https://github.com/SigmaHQ/sigma&gt;</a:t>
-            </a:r>
-          </a:p>
-          <a:p>
-            <a:pPr>
-              <a:spcAft>
-                <a:spcPts val="600"/>
-              </a:spcAft>
-            </a:pPr>
-            <a:r>
-              <a:rPr sz="1500">
-                <a:solidFill>
-                  <a:srgbClr val="22282E"/>
-                </a:solidFill>
-              </a:rPr>
-              <a:t>•  Atomic Red Team — &lt;https://github.com/redcanaryco/atomic-red-team&gt;</a:t>
-            </a:r>
-          </a:p>
-          <a:p>
-            <a:pPr>
-              <a:spcAft>
-                <a:spcPts val="600"/>
-              </a:spcAft>
-            </a:pPr>
-            <a:r>
-              <a:rPr sz="1500">
-                <a:solidFill>
-                  <a:srgbClr val="22282E"/>
-                </a:solidFill>
-              </a:rPr>
-              <a:t>•  MITRE ATT&amp;CK — &lt;https://attack.mitre.org/&gt;</a:t>
-            </a:r>
-          </a:p>
-          <a:p>
-            <a:pPr>
-              <a:spcAft>
-                <a:spcPts val="600"/>
-              </a:spcAft>
-            </a:pPr>
-            <a:r>
-              <a:rPr sz="1500">
-                <a:solidFill>
-                  <a:srgbClr val="22282E"/>
-                </a:solidFill>
-              </a:rPr>
-              <a:t>•  Palantir, "Alerting and Detection Strategy Framework" — &lt;https://github.com/palantir/alerting-detection-strategy-framework&gt;</a:t>
-            </a:r>
-          </a:p>
-          <a:p>
-            <a:pPr>
-              <a:spcAft>
-                <a:spcPts val="600"/>
-              </a:spcAft>
-            </a:pPr>
-            <a:r>
-              <a:rPr sz="1500">
-                <a:solidFill>
-                  <a:srgbClr val="22282E"/>
-                </a:solidFill>
-              </a:rPr>
-              <a:t>•  Splunk, "Detection Engineering" (recursos formativos).</a:t>
-            </a:r>
-          </a:p>
-        </p:txBody>
-      </p:sp>
+              <a:t>•  Diseña la plantilla de metadatos de una detección completa.</a:t>
+            </a:r>
+          </a:p>
+          <a:p>
+            <a:pPr>
+              <a:spcAft>
+                <a:spcPts val="600"/>
+              </a:spcAft>
+            </a:pPr>
+            <a:r>
+              <a:rPr sz="1500">
+                <a:solidFill>
+                  <a:srgbClr val="22282E"/>
+                </a:solidFill>
+              </a:rPr>
+              <a:t>•  Escribe el pipeline de CI (pseudo-YAML) que valide y convierta reglas.</a:t>
+            </a:r>
+          </a:p>
+          <a:p>
+            <a:pPr>
+              <a:spcAft>
+                <a:spcPts val="600"/>
+              </a:spcAft>
+            </a:pPr>
+            <a:r>
+              <a:rPr sz="1500">
+                <a:solidFill>
+                  <a:srgbClr val="22282E"/>
+                </a:solidFill>
+              </a:rPr>
+              <a:t>•  Valida una detección con el test de Atomic Red Team adecuado.</a:t>
+            </a:r>
+          </a:p>
+          <a:p>
+            <a:pPr>
+              <a:spcAft>
+                <a:spcPts val="600"/>
+              </a:spcAft>
+            </a:pPr>
+            <a:r>
+              <a:rPr sz="1500">
+                <a:solidFill>
+                  <a:srgbClr val="22282E"/>
+                </a:solidFill>
+              </a:rPr>
+              <a:t>•  Define criterios objetivos para retirar una detección.</a:t>
+            </a:r>
+          </a:p>
+          <a:p>
+            <a:pPr>
+              <a:spcAft>
+                <a:spcPts val="600"/>
+              </a:spcAft>
+            </a:pPr>
+            <a:r>
+              <a:rPr sz="1500">
+                <a:solidFill>
+                  <a:srgbClr val="22282E"/>
+                </a:solidFill>
+              </a:rPr>
+              <a:t>•  Calcula la precisión de una regla con TP/FP de ejemplo.</a:t>
+            </a:r>
+          </a:p>
+          <a:p>
+            <a:pPr>
+              <a:spcAft>
+                <a:spcPts val="600"/>
+              </a:spcAft>
+            </a:pPr>
+            <a:r>
+              <a:rPr sz="1500">
+                <a:solidFill>
+                  <a:srgbClr val="22282E"/>
+                </a:solidFill>
+              </a:rPr>
+              <a:t>•  Explica cómo el versionado ayuda a auditar cambios de detección.</a:t>
+            </a:r>
+          </a:p>
+        </p:txBody>
+      </p:sp>
+    </p:spTree>
+  </p:cSld>
+  <p:clrMapOvr>
+    <a:masterClrMapping/>
+  </p:clrMapOvr>
+</p:sld>
+</file>
+
+<file path=ppt/slides/slide13.xml><?xml version="1.0" encoding="utf-8"?>
+<p:sld xmlns:a="http://schemas.openxmlformats.org/drawingml/2006/main" xmlns:p="http://schemas.openxmlformats.org/presentationml/2006/main" xmlns:r="http://schemas.openxmlformats.org/officeDocument/2006/relationships">
+  <p:cSld>
+    <p:spTree>
+      <p:nvGrpSpPr>
+        <p:cNvPr id="1" name=""/>
+        <p:cNvGrpSpPr/>
+        <p:nvPr/>
+      </p:nvGrpSpPr>
+      <p:grpSpPr/>
+      <p:sp>
+        <p:nvSpPr>
+          <p:cNvPr id="2" name="TextBox 1"/>
+          <p:cNvSpPr txBox="1"/>
+          <p:nvPr/>
+        </p:nvSpPr>
+        <p:spPr>
+          <a:xfrm>
+            <a:off x="457200" y="320040"/>
+            <a:ext cx="8229600" cy="822960"/>
+          </a:xfrm>
+          <a:prstGeom prst="rect">
+            <a:avLst/>
+          </a:prstGeom>
+          <a:noFill/>
+        </p:spPr>
+        <p:txBody>
+          <a:bodyPr wrap="square">
+            <a:spAutoFit/>
+          </a:bodyPr>
+          <a:lstStyle/>
+          <a:p>
+            <a:r>
+              <a:rPr sz="2600" b="1">
+                <a:solidFill>
+                  <a:srgbClr val="0B3D2E"/>
+                </a:solidFill>
+              </a:rPr>
+              <a:t>📝 Reto verificable</a:t>
+            </a:r>
+          </a:p>
+        </p:txBody>
+      </p:sp>
+      <p:sp>
+        <p:nvSpPr>
+          <p:cNvPr id="3" name="TextBox 2"/>
+          <p:cNvSpPr txBox="1"/>
+          <p:nvPr/>
+        </p:nvSpPr>
+        <p:spPr>
+          <a:xfrm>
+            <a:off x="457200" y="1280160"/>
+            <a:ext cx="8229600" cy="4937760"/>
+          </a:xfrm>
+          <a:prstGeom prst="rect">
+            <a:avLst/>
+          </a:prstGeom>
+          <a:noFill/>
+        </p:spPr>
+        <p:txBody>
+          <a:bodyPr wrap="square">
+            <a:spAutoFit/>
+          </a:bodyPr>
+          <a:lstStyle/>
+          <a:p>
+            <a:pPr>
+              <a:spcAft>
+                <a:spcPts val="600"/>
+              </a:spcAft>
+            </a:pPr>
+            <a:r>
+              <a:rPr sz="1500">
+                <a:solidFill>
+                  <a:srgbClr val="22282E"/>
+                </a:solidFill>
+              </a:rPr>
+              <a:t>•  Entrega un mini repositorio de detección como código con al menos tres reglas documentadas, un pipeline que valida y convierte sintaxis, y la evidencia de que una de ellas fue validada con Atomic Red…</a:t>
+            </a:r>
+          </a:p>
+        </p:txBody>
+      </p:sp>
+    </p:spTree>
+  </p:cSld>
+  <p:clrMapOvr>
+    <a:masterClrMapping/>
+  </p:clrMapOvr>
+</p:sld>
+</file>
+
+<file path=ppt/slides/slide14.xml><?xml version="1.0" encoding="utf-8"?>
+<p:sld xmlns:a="http://schemas.openxmlformats.org/drawingml/2006/main" xmlns:p="http://schemas.openxmlformats.org/presentationml/2006/main" xmlns:r="http://schemas.openxmlformats.org/officeDocument/2006/relationships">
+  <p:cSld>
+    <p:spTree>
+      <p:nvGrpSpPr>
+        <p:cNvPr id="1" name=""/>
+        <p:cNvGrpSpPr/>
+        <p:nvPr/>
+      </p:nvGrpSpPr>
+      <p:grpSpPr/>
+      <p:sp>
+        <p:nvSpPr>
+          <p:cNvPr id="2" name="TextBox 1"/>
+          <p:cNvSpPr txBox="1"/>
+          <p:nvPr/>
+        </p:nvSpPr>
+        <p:spPr>
+          <a:xfrm>
+            <a:off x="457200" y="320040"/>
+            <a:ext cx="8229600" cy="822960"/>
+          </a:xfrm>
+          <a:prstGeom prst="rect">
+            <a:avLst/>
+          </a:prstGeom>
+          <a:noFill/>
+        </p:spPr>
+        <p:txBody>
+          <a:bodyPr wrap="square">
+            <a:spAutoFit/>
+          </a:bodyPr>
+          <a:lstStyle/>
+          <a:p>
+            <a:r>
+              <a:rPr sz="2600" b="1">
+                <a:solidFill>
+                  <a:srgbClr val="0B3D2E"/>
+                </a:solidFill>
+              </a:rPr>
+              <a:t>⚠️ Errores comunes</a:t>
+            </a:r>
+          </a:p>
+        </p:txBody>
+      </p:sp>
+      <p:sp>
+        <p:nvSpPr>
+          <p:cNvPr id="3" name="TextBox 2"/>
+          <p:cNvSpPr txBox="1"/>
+          <p:nvPr/>
+        </p:nvSpPr>
+        <p:spPr>
+          <a:xfrm>
+            <a:off x="457200" y="1280160"/>
+            <a:ext cx="8229600" cy="4937760"/>
+          </a:xfrm>
+          <a:prstGeom prst="rect">
+            <a:avLst/>
+          </a:prstGeom>
+          <a:noFill/>
+        </p:spPr>
+        <p:txBody>
+          <a:bodyPr wrap="square">
+            <a:spAutoFit/>
+          </a:bodyPr>
+          <a:lstStyle/>
+          <a:p>
+            <a:pPr>
+              <a:spcAft>
+                <a:spcPts val="600"/>
+              </a:spcAft>
+            </a:pPr>
+            <a:r>
+              <a:rPr sz="1500">
+                <a:solidFill>
+                  <a:srgbClr val="22282E"/>
+                </a:solidFill>
+              </a:rPr>
+              <a:t>•  Regla rota llega a producción — Sin CI de validación; añade sigma check al pipeline</a:t>
+            </a:r>
+          </a:p>
+          <a:p>
+            <a:pPr>
+              <a:spcAft>
+                <a:spcPts val="600"/>
+              </a:spcAft>
+            </a:pPr>
+            <a:r>
+              <a:rPr sz="1500">
+                <a:solidFill>
+                  <a:srgbClr val="22282E"/>
+                </a:solidFill>
+              </a:rPr>
+              <a:t>•  Nadie sabe qué hace una alerta — Falta documentación/respuesta; exige metadatos por regla</a:t>
+            </a:r>
+          </a:p>
+          <a:p>
+            <a:pPr>
+              <a:spcAft>
+                <a:spcPts val="600"/>
+              </a:spcAft>
+            </a:pPr>
+            <a:r>
+              <a:rPr sz="1500">
+                <a:solidFill>
+                  <a:srgbClr val="22282E"/>
+                </a:solidFill>
+              </a:rPr>
+              <a:t>•  Cobertura "teórica" que no dispara — No validada; prueba con Atomic Red Team</a:t>
+            </a:r>
+          </a:p>
+          <a:p>
+            <a:pPr>
+              <a:spcAft>
+                <a:spcPts val="600"/>
+              </a:spcAft>
+            </a:pPr>
+            <a:r>
+              <a:rPr sz="1500">
+                <a:solidFill>
+                  <a:srgbClr val="22282E"/>
+                </a:solidFill>
+              </a:rPr>
+              <a:t>•  Reglas ruidosas acumuladas — Deuda de detección sin gestionar; revisa y retira periódicamente</a:t>
+            </a:r>
+          </a:p>
+          <a:p>
+            <a:pPr>
+              <a:spcAft>
+                <a:spcPts val="600"/>
+              </a:spcAft>
+            </a:pPr>
+            <a:r>
+              <a:rPr sz="1500">
+                <a:solidFill>
+                  <a:srgbClr val="22282E"/>
+                </a:solidFill>
+              </a:rPr>
+              <a:t>•  Cambios sin trazabilidad — Detecciones fuera de control de versiones; muévelas a Git</a:t>
+            </a:r>
+          </a:p>
+        </p:txBody>
+      </p:sp>
+    </p:spTree>
+  </p:cSld>
+  <p:clrMapOvr>
+    <a:masterClrMapping/>
+  </p:clrMapOvr>
+</p:sld>
+</file>
+
+<file path=ppt/slides/slide15.xml><?xml version="1.0" encoding="utf-8"?>
+<p:sld xmlns:a="http://schemas.openxmlformats.org/drawingml/2006/main" xmlns:p="http://schemas.openxmlformats.org/presentationml/2006/main" xmlns:r="http://schemas.openxmlformats.org/officeDocument/2006/relationships">
+  <p:cSld>
+    <p:spTree>
+      <p:nvGrpSpPr>
+        <p:cNvPr id="1" name=""/>
+        <p:cNvGrpSpPr/>
+        <p:nvPr/>
+      </p:nvGrpSpPr>
+      <p:grpSpPr/>
+      <p:sp>
+        <p:nvSpPr>
+          <p:cNvPr id="2" name="TextBox 1"/>
+          <p:cNvSpPr txBox="1"/>
+          <p:nvPr/>
+        </p:nvSpPr>
+        <p:spPr>
+          <a:xfrm>
+            <a:off x="457200" y="320040"/>
+            <a:ext cx="8229600" cy="822960"/>
+          </a:xfrm>
+          <a:prstGeom prst="rect">
+            <a:avLst/>
+          </a:prstGeom>
+          <a:noFill/>
+        </p:spPr>
+        <p:txBody>
+          <a:bodyPr wrap="square">
+            <a:spAutoFit/>
+          </a:bodyPr>
+          <a:lstStyle/>
+          <a:p>
+            <a:r>
+              <a:rPr sz="2600" b="1">
+                <a:solidFill>
+                  <a:srgbClr val="0B3D2E"/>
+                </a:solidFill>
+              </a:rPr>
+              <a:t>❓ Preguntas frecuentes</a:t>
+            </a:r>
+          </a:p>
+        </p:txBody>
+      </p:sp>
+      <p:sp>
+        <p:nvSpPr>
+          <p:cNvPr id="3" name="TextBox 2"/>
+          <p:cNvSpPr txBox="1"/>
+          <p:nvPr/>
+        </p:nvSpPr>
+        <p:spPr>
+          <a:xfrm>
+            <a:off x="457200" y="1280160"/>
+            <a:ext cx="8229600" cy="4937760"/>
+          </a:xfrm>
+          <a:prstGeom prst="rect">
+            <a:avLst/>
+          </a:prstGeom>
+          <a:noFill/>
+        </p:spPr>
+        <p:txBody>
+          <a:bodyPr wrap="square">
+            <a:spAutoFit/>
+          </a:bodyPr>
+          <a:lstStyle/>
+          <a:p>
+            <a:pPr>
+              <a:spcAft>
+                <a:spcPts val="600"/>
+              </a:spcAft>
+            </a:pPr>
+            <a:r>
+              <a:rPr sz="1500">
+                <a:solidFill>
+                  <a:srgbClr val="22282E"/>
+                </a:solidFill>
+              </a:rPr>
+              <a:t>•  ❓ ¿Por qué tratar detecciones como software?</a:t>
+            </a:r>
+          </a:p>
+          <a:p>
+            <a:pPr>
+              <a:spcAft>
+                <a:spcPts val="600"/>
+              </a:spcAft>
+            </a:pPr>
+            <a:r>
+              <a:rPr sz="1500">
+                <a:solidFill>
+                  <a:srgbClr val="22282E"/>
+                </a:solidFill>
+              </a:rPr>
+              <a:t>•  Porque comparten problemas: calidad, regresiones, mantenimiento y colaboración. Aplicar control de versiones, revisión y CI evita que tu cobertura se degrade sin que nadie lo note.</a:t>
+            </a:r>
+          </a:p>
+          <a:p>
+            <a:pPr>
+              <a:spcAft>
+                <a:spcPts val="600"/>
+              </a:spcAft>
+            </a:pPr>
+            <a:r>
+              <a:rPr sz="1500">
+                <a:solidFill>
+                  <a:srgbClr val="22282E"/>
+                </a:solidFill>
+              </a:rPr>
+              <a:t>•  ❓ ¿Toda detección debe validarse con Atomic?</a:t>
+            </a:r>
+          </a:p>
+          <a:p>
+            <a:pPr>
+              <a:spcAft>
+                <a:spcPts val="600"/>
+              </a:spcAft>
+            </a:pPr>
+            <a:r>
+              <a:rPr sz="1500">
+                <a:solidFill>
+                  <a:srgbClr val="22282E"/>
+                </a:solidFill>
+              </a:rPr>
+              <a:t>•  Cuando exista un procedimiento seguro y representativo, conviene validarlo. Una prueba atómica demuestra la respuesta ante esa variante, datos y configuración; no acredita todas las implementaciones…</a:t>
+            </a:r>
+          </a:p>
+          <a:p>
+            <a:pPr>
+              <a:spcAft>
+                <a:spcPts val="600"/>
+              </a:spcAft>
+            </a:pPr>
+            <a:r>
+              <a:rPr sz="1500">
+                <a:solidFill>
+                  <a:srgbClr val="22282E"/>
+                </a:solidFill>
+              </a:rPr>
+              <a:t>•  ❓ ¿Cuándo retiro una detección?</a:t>
+            </a:r>
+          </a:p>
+          <a:p>
+            <a:pPr>
+              <a:spcAft>
+                <a:spcPts val="600"/>
+              </a:spcAft>
+            </a:pPr>
+            <a:r>
+              <a:rPr sz="1500">
+                <a:solidFill>
+                  <a:srgbClr val="22282E"/>
+                </a:solidFill>
+              </a:rPr>
+              <a:t>•  Cuando su ratio de falsos positivos es insostenible, la técnica ya no aplica, o otra regla la cubre mejor. Documenta la decisión: retirar también es ingeniería.</a:t>
+            </a:r>
+          </a:p>
+        </p:txBody>
+      </p:sp>
+    </p:spTree>
+  </p:cSld>
+  <p:clrMapOvr>
+    <a:masterClrMapping/>
+  </p:clrMapOvr>
+</p:sld>
+</file>
+
+<file path=ppt/slides/slide16.xml><?xml version="1.0" encoding="utf-8"?>
+<p:sld xmlns:a="http://schemas.openxmlformats.org/drawingml/2006/main" xmlns:p="http://schemas.openxmlformats.org/presentationml/2006/main" xmlns:r="http://schemas.openxmlformats.org/officeDocument/2006/relationships">
+  <p:cSld>
+    <p:spTree>
+      <p:nvGrpSpPr>
+        <p:cNvPr id="1" name=""/>
+        <p:cNvGrpSpPr/>
+        <p:nvPr/>
+      </p:nvGrpSpPr>
+      <p:grpSpPr/>
+      <p:sp>
+        <p:nvSpPr>
+          <p:cNvPr id="2" name="TextBox 1"/>
+          <p:cNvSpPr txBox="1"/>
+          <p:nvPr/>
+        </p:nvSpPr>
+        <p:spPr>
+          <a:xfrm>
+            <a:off x="457200" y="320040"/>
+            <a:ext cx="8229600" cy="822960"/>
+          </a:xfrm>
+          <a:prstGeom prst="rect">
+            <a:avLst/>
+          </a:prstGeom>
+          <a:noFill/>
+        </p:spPr>
+        <p:txBody>
+          <a:bodyPr wrap="square">
+            <a:spAutoFit/>
+          </a:bodyPr>
+          <a:lstStyle/>
+          <a:p>
+            <a:r>
+              <a:rPr sz="2600" b="1">
+                <a:solidFill>
+                  <a:srgbClr val="0B3D2E"/>
+                </a:solidFill>
+              </a:rPr>
+              <a:t>🔗 Referencias verificables y alcance</a:t>
+            </a:r>
+          </a:p>
+        </p:txBody>
+      </p:sp>
+      <p:sp>
+        <p:nvSpPr>
+          <p:cNvPr id="3" name="TextBox 2"/>
+          <p:cNvSpPr txBox="1"/>
+          <p:nvPr/>
+        </p:nvSpPr>
+        <p:spPr>
+          <a:xfrm>
+            <a:off x="457200" y="1280160"/>
+            <a:ext cx="8229600" cy="4937760"/>
+          </a:xfrm>
+          <a:prstGeom prst="rect">
+            <a:avLst/>
+          </a:prstGeom>
+          <a:noFill/>
+        </p:spPr>
+        <p:txBody>
+          <a:bodyPr wrap="square">
+            <a:spAutoFit/>
+          </a:bodyPr>
+          <a:lstStyle/>
+          <a:p>
+            <a:pPr>
+              <a:spcAft>
+                <a:spcPts val="600"/>
+              </a:spcAft>
+            </a:pPr>
+            <a:r>
+              <a:rPr sz="1500">
+                <a:solidFill>
+                  <a:srgbClr val="22282E"/>
+                </a:solidFill>
+              </a:rPr>
+              <a:t>•  Sigma Rules Specification: especificación oficial usada para estructura, validación y conversión de reglas portables —…</a:t>
+            </a:r>
+          </a:p>
+          <a:p>
+            <a:pPr>
+              <a:spcAft>
+                <a:spcPts val="600"/>
+              </a:spcAft>
+            </a:pPr>
+            <a:r>
+              <a:rPr sz="1500">
+                <a:solidFill>
+                  <a:srgbClr val="22282E"/>
+                </a:solidFill>
+              </a:rPr>
+              <a:t>•  MITRE ATT&amp;CK Detection Strategies: contenido oficial para relacionar estrategia, analíticas y componentes de datos — &lt;https://attack.mitre.org/detectionstrategies/&gt;</a:t>
+            </a:r>
+          </a:p>
+          <a:p>
+            <a:pPr>
+              <a:spcAft>
+                <a:spcPts val="600"/>
+              </a:spcAft>
+            </a:pPr>
+            <a:r>
+              <a:rPr sz="1500">
+                <a:solidFill>
+                  <a:srgbClr val="22282E"/>
+                </a:solidFill>
+              </a:rPr>
+              <a:t>•  Atomic Red Team: documentación oficial de pruebas focalizadas, prerrequisitos, permisos y limpieza; una prueba valida el procedimiento y entorno ejecutados, no toda variante de una técnica —…</a:t>
+            </a:r>
+          </a:p>
+          <a:p>
+            <a:pPr>
+              <a:spcAft>
+                <a:spcPts val="600"/>
+              </a:spcAft>
+            </a:pPr>
+            <a:r>
+              <a:rPr sz="1500">
+                <a:solidFill>
+                  <a:srgbClr val="22282E"/>
+                </a:solidFill>
+              </a:rPr>
+              <a:t>•  Palantir, Alerting and Detection Strategy Framework: marco público para documentar objetivos, lógica, respuesta y prueba; se usa como referencia de diseño, no como estándar normativo —…</a:t>
+            </a:r>
+          </a:p>
+          <a:p>
+            <a:pPr>
+              <a:spcAft>
+                <a:spcPts val="600"/>
+              </a:spcAft>
+            </a:pPr>
+            <a:r>
+              <a:rPr sz="1500">
+                <a:solidFill>
+                  <a:srgbClr val="22282E"/>
+                </a:solidFill>
+              </a:rPr>
+              <a:t>•  SigmaHQ Rules: repositorio comunitario de contenido que debe adaptarse, probarse, versionarse y mantenerse localmente — &lt;https://github.com/SigmaHQ/sigma&gt;</a:t>
+            </a:r>
+          </a:p>
+        </p:txBody>
+      </p:sp>
+    </p:spTree>
+  </p:cSld>
+  <p:clrMapOvr>
+    <a:masterClrMapping/>
+  </p:clrMapOvr>
+</p:sld>
+</file>
+
+<file path=ppt/slides/slide17.xml><?xml version="1.0" encoding="utf-8"?>
+<p:sld xmlns:a="http://schemas.openxmlformats.org/drawingml/2006/main" xmlns:p="http://schemas.openxmlformats.org/presentationml/2006/main" xmlns:r="http://schemas.openxmlformats.org/officeDocument/2006/relationships">
+  <p:cSld>
+    <p:spTree>
+      <p:nvGrpSpPr>
+        <p:cNvPr id="1" name=""/>
+        <p:cNvGrpSpPr/>
+        <p:nvPr/>
+      </p:nvGrpSpPr>
+      <p:grpSpPr/>
+      <p:sp>
+        <p:nvSpPr>
+          <p:cNvPr id="2" name="TextBox 1"/>
+          <p:cNvSpPr txBox="1"/>
+          <p:nvPr/>
+        </p:nvSpPr>
+        <p:spPr>
+          <a:xfrm>
+            <a:off x="457200" y="274320"/>
+            <a:ext cx="8229600" cy="640080"/>
+          </a:xfrm>
+          <a:prstGeom prst="rect">
+            <a:avLst/>
+          </a:prstGeom>
+          <a:noFill/>
+        </p:spPr>
+        <p:txBody>
+          <a:bodyPr wrap="square">
+            <a:spAutoFit/>
+          </a:bodyPr>
+          <a:lstStyle/>
+          <a:p>
+            <a:r>
+              <a:rPr sz="2200" b="1">
+                <a:solidFill>
+                  <a:srgbClr val="0B3D2E"/>
+                </a:solidFill>
+              </a:rPr>
+              <a:t>Diagrama de la clase</a:t>
+            </a:r>
+          </a:p>
+        </p:txBody>
+      </p:sp>
+      <p:pic>
+        <p:nvPicPr>
+          <p:cNvPr id="3" name="Picture 2" descr="45c47163585a0f1c.png"/>
+          <p:cNvPicPr>
+            <a:picLocks noChangeAspect="1"/>
+          </p:cNvPicPr>
+          <p:nvPr/>
+        </p:nvPicPr>
+        <p:blipFill>
+          <a:blip r:embed="rId2"/>
+          <a:stretch>
+            <a:fillRect/>
+          </a:stretch>
+        </p:blipFill>
+        <p:spPr>
+          <a:xfrm>
+            <a:off x="457200" y="3022092"/>
+            <a:ext cx="8229600" cy="1453896"/>
+          </a:xfrm>
+          <a:prstGeom prst="rect">
+            <a:avLst/>
+          </a:prstGeom>
+        </p:spPr>
+      </p:pic>
     </p:spTree>
   </p:cSld>
   <p:clrMapOvr>
@@ -3698,7 +4374,7 @@
                   <a:srgbClr val="22282E"/>
                 </a:solidFill>
               </a:rPr>
-              <a:t>•  Tratar la detección como ingeniería, no como un conjunto de reglas sueltas: un ciclo de vida con requisitos, desarrollo, pruebas, despliegue, versionado y retiro, gestionado como código (detection-as-code) con CI/CD. Aprenderás a documentar detecciones, medir su calidad, validarlas contra ataques reales y evitar la degradación silenciosa de tu cobertura.</a:t>
+              <a:t>•  Tratar la detección como ingeniería, no como un conjunto de reglas sueltas: un ciclo de vida con requisitos, desarrollo, pruebas, despliegue, versionado y retiro, gestionado como código…</a:t>
             </a:r>
           </a:p>
         </p:txBody>
@@ -4092,7 +4768,7 @@
                   <a:srgbClr val="0B3D2E"/>
                 </a:solidFill>
               </a:rPr>
-              <a:t>📖 Definiciones y características</a:t>
+              <a:t>🧠 Explicación en profundidad</a:t>
             </a:r>
           </a:p>
         </p:txBody>
@@ -4130,97 +4806,97 @@
                   <a:srgbClr val="22282E"/>
                 </a:solidFill>
               </a:rPr>
-              <a:t>•  Ingeniería de detección: disciplina de crear, probar y mantener detecciones con rigor de ingeniería. Característica: ciclo de vida, calidad medible y mejora continua.</a:t>
-            </a:r>
-          </a:p>
-          <a:p>
-            <a:pPr>
-              <a:spcAft>
-                <a:spcPts val="600"/>
-              </a:spcAft>
-            </a:pPr>
-            <a:r>
-              <a:rPr sz="1500">
-                <a:solidFill>
-                  <a:srgbClr val="22282E"/>
-                </a:solidFill>
-              </a:rPr>
-              <a:t>•  Detection-as-code: gestionar reglas como código versionado (Sigma en Git). Característica: revisión por pares, historial y reproducibilidad.</a:t>
-            </a:r>
-          </a:p>
-          <a:p>
-            <a:pPr>
-              <a:spcAft>
-                <a:spcPts val="600"/>
-              </a:spcAft>
-            </a:pPr>
-            <a:r>
-              <a:rPr sz="1500">
-                <a:solidFill>
-                  <a:srgbClr val="22282E"/>
-                </a:solidFill>
-              </a:rPr>
-              <a:t>•  CI/CD de detecciones: pipeline que valida sintaxis, convierte y prueba reglas automáticamente. Característica: previene reglas rotas en producción.</a:t>
-            </a:r>
-          </a:p>
-          <a:p>
-            <a:pPr>
-              <a:spcAft>
-                <a:spcPts val="600"/>
-              </a:spcAft>
-            </a:pPr>
-            <a:r>
-              <a:rPr sz="1500">
-                <a:solidFill>
-                  <a:srgbClr val="22282E"/>
-                </a:solidFill>
-              </a:rPr>
-              <a:t>•  Metadatos de detección: contexto de la regla (autor, ATT&amp;CK, falsos positivos, respuesta). Característica: acelera el triaje y el mantenimiento.</a:t>
-            </a:r>
-          </a:p>
-          <a:p>
-            <a:pPr>
-              <a:spcAft>
-                <a:spcPts val="600"/>
-              </a:spcAft>
-            </a:pPr>
-            <a:r>
-              <a:rPr sz="1500">
-                <a:solidFill>
-                  <a:srgbClr val="22282E"/>
-                </a:solidFill>
-              </a:rPr>
-              <a:t>•  Validación: ejecutar la técnica y comprobar que la regla dispara. Característica: distingue cobertura real de teórica.</a:t>
-            </a:r>
-          </a:p>
-          <a:p>
-            <a:pPr>
-              <a:spcAft>
-                <a:spcPts val="600"/>
-              </a:spcAft>
-            </a:pPr>
-            <a:r>
-              <a:rPr sz="1500">
-                <a:solidFill>
-                  <a:srgbClr val="22282E"/>
-                </a:solidFill>
-              </a:rPr>
-              <a:t>•  Deuda de detección: reglas obsoletas, ruidosas o sin dueño. Característica: degrada la señal si no se gestiona.</a:t>
-            </a:r>
-          </a:p>
-          <a:p>
-            <a:pPr>
-              <a:spcAft>
-                <a:spcPts val="600"/>
-              </a:spcAft>
-            </a:pPr>
-            <a:r>
-              <a:rPr sz="1500">
-                <a:solidFill>
-                  <a:srgbClr val="22282E"/>
-                </a:solidFill>
-              </a:rPr>
-              <a:t>•  Precisión de detección: proporción de alertas verdaderas sobre el total. Característica: mide la calidad, no la cantidad.</a:t>
+              <a:t>•  La ingeniería de detección trata cada analítica como producto mantenible. Comienza con hipótesis y contrato de datos, no con sintaxis del SIEM. El contrato declara fuentes, campos, semántica…</a:t>
+            </a:r>
+          </a:p>
+          <a:p>
+            <a:pPr>
+              <a:spcAft>
+                <a:spcPts val="600"/>
+              </a:spcAft>
+            </a:pPr>
+            <a:r>
+              <a:rPr sz="1500">
+                <a:solidFill>
+                  <a:srgbClr val="22282E"/>
+                </a:solidFill>
+              </a:rPr>
+              <a:t>•  Detection-as-code incluye regla, metadatos, mapeos y fixtures positivos y negativos. CI valida esquema, conversión, resultados y coste. En producción se vigilan tasa, latencia, campos nulos y…</a:t>
+            </a:r>
+          </a:p>
+          <a:p>
+            <a:pPr>
+              <a:spcAft>
+                <a:spcPts val="600"/>
+              </a:spcAft>
+            </a:pPr>
+            <a:r>
+              <a:rPr sz="1500">
+                <a:solidFill>
+                  <a:srgbClr val="22282E"/>
+                </a:solidFill>
+              </a:rPr>
+              <a:t>•  MITRE ATT&amp;CK Detection Strategies conecta comportamiento, analítica y fuentes posibles; Sigma ofrece una especificación portable; Atomic Red Team aporta procedimientos controlados. Ninguna fuente…</a:t>
+            </a:r>
+          </a:p>
+          <a:p>
+            <a:pPr>
+              <a:spcAft>
+                <a:spcPts val="600"/>
+              </a:spcAft>
+            </a:pPr>
+            <a:r>
+              <a:rPr sz="1500">
+                <a:solidFill>
+                  <a:srgbClr val="22282E"/>
+                </a:solidFill>
+              </a:rPr>
+              <a:t>•  El contrato de datos nombra productor, campos, tipos, significado, latencia, retención y umbrales de calidad. Para detectar creación remota de servicio, por ejemplo, no basta servicename: se…</a:t>
+            </a:r>
+          </a:p>
+          <a:p>
+            <a:pPr>
+              <a:spcAft>
+                <a:spcPts val="600"/>
+              </a:spcAft>
+            </a:pPr>
+            <a:r>
+              <a:rPr sz="1500">
+                <a:solidFill>
+                  <a:srgbClr val="22282E"/>
+                </a:solidFill>
+              </a:rPr>
+              <a:t>•  Detection-as-code no es guardar consultas en Git. El repositorio incluye regla, explicación, ATT&amp;CK justificado, datos requeridos, fixtures, conversión, propietario, severidad, excepciones y…</a:t>
+            </a:r>
+          </a:p>
+          <a:p>
+            <a:pPr>
+              <a:spcAft>
+                <a:spcPts val="600"/>
+              </a:spcAft>
+            </a:pPr>
+            <a:r>
+              <a:rPr sz="1500">
+                <a:solidFill>
+                  <a:srgbClr val="22282E"/>
+                </a:solidFill>
+              </a:rPr>
+              <a:t>•  Atomic Red Team puede generar un procedimiento conocido, pero ejecutar un test no demuestra cobertura completa de la técnica. Valida esa variante, sistema y configuración. Se registra comando…</a:t>
+            </a:r>
+          </a:p>
+          <a:p>
+            <a:pPr>
+              <a:spcAft>
+                <a:spcPts val="600"/>
+              </a:spcAft>
+            </a:pPr>
+            <a:r>
+              <a:rPr sz="1500">
+                <a:solidFill>
+                  <a:srgbClr val="22282E"/>
+                </a:solidFill>
+              </a:rPr>
+              <a:t>•  El rollout puede comenzar en modo hunting, después alertar a un grupo y finalmente ampliar. Se vigilan coincidencias, entidades únicas, latencia, errores, campos nulos y esfuerzo de triaje. Un…</a:t>
             </a:r>
           </a:p>
         </p:txBody>
@@ -4271,7 +4947,7 @@
                   <a:srgbClr val="0B3D2E"/>
                 </a:solidFill>
               </a:rPr>
-              <a:t>🧰 Herramientas y preparación</a:t>
+              <a:t>📔 Glosario</a:t>
             </a:r>
           </a:p>
         </p:txBody>
@@ -4309,82 +4985,97 @@
                   <a:srgbClr val="22282E"/>
                 </a:solidFill>
               </a:rPr>
-              <a:t>•  Un repositorio Git para tus reglas Sigma (clase 186) como fuente de verdad.</a:t>
-            </a:r>
-          </a:p>
-          <a:p>
-            <a:pPr>
-              <a:spcAft>
-                <a:spcPts val="600"/>
-              </a:spcAft>
-            </a:pPr>
-            <a:r>
-              <a:rPr sz="1500">
-                <a:solidFill>
-                  <a:srgbClr val="22282E"/>
-                </a:solidFill>
-              </a:rPr>
-              <a:t>•  sigma-cli/pySigma en un pipeline de CI (GitHub Actions/GitLab CI) para validar y convertir.</a:t>
-            </a:r>
-          </a:p>
-          <a:p>
-            <a:pPr>
-              <a:spcAft>
-                <a:spcPts val="600"/>
-              </a:spcAft>
-            </a:pPr>
-            <a:r>
-              <a:rPr sz="1500">
-                <a:solidFill>
-                  <a:srgbClr val="22282E"/>
-                </a:solidFill>
-              </a:rPr>
-              <a:t>•  Atomic Red Team para validar que cada detección dispara ante su técnica.</a:t>
-            </a:r>
-          </a:p>
-          <a:p>
-            <a:pPr>
-              <a:spcAft>
-                <a:spcPts val="600"/>
-              </a:spcAft>
-            </a:pPr>
-            <a:r>
-              <a:rPr sz="1500">
-                <a:solidFill>
-                  <a:srgbClr val="22282E"/>
-                </a:solidFill>
-              </a:rPr>
-              <a:t>•  Tu SIEM de laboratorio como destino de despliegue.</a:t>
-            </a:r>
-          </a:p>
-          <a:p>
-            <a:pPr>
-              <a:spcAft>
-                <a:spcPts val="600"/>
-              </a:spcAft>
-            </a:pPr>
-            <a:r>
-              <a:rPr sz="1500">
-                <a:solidFill>
-                  <a:srgbClr val="22282E"/>
-                </a:solidFill>
-              </a:rPr>
-              <a:t>•  Una plantilla de metadatos por detección.</a:t>
-            </a:r>
-          </a:p>
-          <a:p>
-            <a:pPr>
-              <a:spcAft>
-                <a:spcPts val="600"/>
-              </a:spcAft>
-            </a:pPr>
-            <a:r>
-              <a:rPr sz="1500">
-                <a:solidFill>
-                  <a:srgbClr val="22282E"/>
-                </a:solidFill>
-              </a:rPr>
-              <a:t>•  Las validaciones con Atomic Red Team se ejecutan solo en tu laboratorio propio y aislado.</a:t>
+              <a:t>•  Contrato de datos: requisitos verificables de telemetría.</a:t>
+            </a:r>
+          </a:p>
+          <a:p>
+            <a:pPr>
+              <a:spcAft>
+                <a:spcPts val="600"/>
+              </a:spcAft>
+            </a:pPr>
+            <a:r>
+              <a:rPr sz="1500">
+                <a:solidFill>
+                  <a:srgbClr val="22282E"/>
+                </a:solidFill>
+              </a:rPr>
+              <a:t>•  Detection-as-code: contenido versionado y probado.</a:t>
+            </a:r>
+          </a:p>
+          <a:p>
+            <a:pPr>
+              <a:spcAft>
+                <a:spcPts val="600"/>
+              </a:spcAft>
+            </a:pPr>
+            <a:r>
+              <a:rPr sz="1500">
+                <a:solidFill>
+                  <a:srgbClr val="22282E"/>
+                </a:solidFill>
+              </a:rPr>
+              <a:t>•  Fixture: evento de prueba con resultado esperado.</a:t>
+            </a:r>
+          </a:p>
+          <a:p>
+            <a:pPr>
+              <a:spcAft>
+                <a:spcPts val="600"/>
+              </a:spcAft>
+            </a:pPr>
+            <a:r>
+              <a:rPr sz="1500">
+                <a:solidFill>
+                  <a:srgbClr val="22282E"/>
+                </a:solidFill>
+              </a:rPr>
+              <a:t>•  CI: validaciones automáticas previas a integrar.</a:t>
+            </a:r>
+          </a:p>
+          <a:p>
+            <a:pPr>
+              <a:spcAft>
+                <a:spcPts val="600"/>
+              </a:spcAft>
+            </a:pPr>
+            <a:r>
+              <a:rPr sz="1500">
+                <a:solidFill>
+                  <a:srgbClr val="22282E"/>
+                </a:solidFill>
+              </a:rPr>
+              <a:t>•  Drift: cambio del entorno que degrada una regla.</a:t>
+            </a:r>
+          </a:p>
+          <a:p>
+            <a:pPr>
+              <a:spcAft>
+                <a:spcPts val="600"/>
+              </a:spcAft>
+            </a:pPr>
+            <a:r>
+              <a:rPr sz="1500">
+                <a:solidFill>
+                  <a:srgbClr val="22282E"/>
+                </a:solidFill>
+              </a:rPr>
+              <a:t>•  Observabilidad de regla: métricas sobre ejecución.</a:t>
+            </a:r>
+          </a:p>
+          <a:p>
+            <a:pPr>
+              <a:spcAft>
+                <a:spcPts val="600"/>
+              </a:spcAft>
+            </a:pPr>
+            <a:r>
+              <a:rPr sz="1500">
+                <a:solidFill>
+                  <a:srgbClr val="22282E"/>
+                </a:solidFill>
+              </a:rPr>
+              <a:t>•  Retiro: desactivación documentada.</a:t>
             </a:r>
           </a:p>
         </p:txBody>
@@ -4435,7 +5126,7 @@
                   <a:srgbClr val="0B3D2E"/>
                 </a:solidFill>
               </a:rPr>
-              <a:t>🧪 Laboratorio guiado — Un pipeline de detección como código</a:t>
+              <a:t>📖 Definiciones y características</a:t>
             </a:r>
           </a:p>
         </p:txBody>
@@ -4473,97 +5164,97 @@
                   <a:srgbClr val="22282E"/>
                 </a:solidFill>
               </a:rPr>
-              <a:t>•  Estructura el repo. Crea detections/ con tus reglas Sigma y una plantilla de metadatos (título, ATT&amp;CK, fuente de datos, falsos positivos, respuesta).</a:t>
-            </a:r>
-          </a:p>
-          <a:p>
-            <a:pPr>
-              <a:spcAft>
-                <a:spcPts val="600"/>
-              </a:spcAft>
-            </a:pPr>
-            <a:r>
-              <a:rPr sz="1500">
-                <a:solidFill>
-                  <a:srgbClr val="22282E"/>
-                </a:solidFill>
-              </a:rPr>
-              <a:t>•  Añade validación de sintaxis. Un job de CI que corra sigma check sobre todas las reglas al hacer push.</a:t>
-            </a:r>
-          </a:p>
-          <a:p>
-            <a:pPr>
-              <a:spcAft>
-                <a:spcPts val="600"/>
-              </a:spcAft>
-            </a:pPr>
-            <a:r>
-              <a:rPr sz="1500">
-                <a:solidFill>
-                  <a:srgbClr val="22282E"/>
-                </a:solidFill>
-              </a:rPr>
-              <a:t>•  Convierte automáticamente. Otro paso que compile cada regla a tu backend (sigma convert) y falle si alguna no compila.</a:t>
-            </a:r>
-          </a:p>
-          <a:p>
-            <a:pPr>
-              <a:spcAft>
-                <a:spcPts val="600"/>
-              </a:spcAft>
-            </a:pPr>
-            <a:r>
-              <a:rPr sz="1500">
-                <a:solidFill>
-                  <a:srgbClr val="22282E"/>
-                </a:solidFill>
-              </a:rPr>
-              <a:t>•  Escribe una detección nueva. Por ejemplo, ejecución de certutil descargando un archivo (T1105).</a:t>
-            </a:r>
-          </a:p>
-          <a:p>
-            <a:pPr>
-              <a:spcAft>
-                <a:spcPts val="600"/>
-              </a:spcAft>
-            </a:pPr>
-            <a:r>
-              <a:rPr sz="1500">
-                <a:solidFill>
-                  <a:srgbClr val="22282E"/>
-                </a:solidFill>
-              </a:rPr>
-              <a:t>•  Valida con Atomic. Ejecuta el test atómico correspondiente en tu laboratorio y confirma que la regla dispara en el SIEM.</a:t>
-            </a:r>
-          </a:p>
-          <a:p>
-            <a:pPr>
-              <a:spcAft>
-                <a:spcPts val="600"/>
-              </a:spcAft>
-            </a:pPr>
-            <a:r>
-              <a:rPr sz="1500">
-                <a:solidFill>
-                  <a:srgbClr val="22282E"/>
-                </a:solidFill>
-              </a:rPr>
-              <a:t>•  Documenta la respuesta. Añade a la regla qué debe hacer el analista cuando dispare (triaje, contención).</a:t>
-            </a:r>
-          </a:p>
-          <a:p>
-            <a:pPr>
-              <a:spcAft>
-                <a:spcPts val="600"/>
-              </a:spcAft>
-            </a:pPr>
-            <a:r>
-              <a:rPr sz="1500">
-                <a:solidFill>
-                  <a:srgbClr val="22282E"/>
-                </a:solidFill>
-              </a:rPr>
-              <a:t>•  Gestiona el ciclo. Marca una regla vieja y ruidosa para retiro; registra la decisión en el historial de Git.</a:t>
+              <a:t>•  Ingeniería de detección: disciplina de crear, probar y mantener detecciones con rigor de ingeniería. Característica: ciclo de vida, calidad medible y mejora continua.</a:t>
+            </a:r>
+          </a:p>
+          <a:p>
+            <a:pPr>
+              <a:spcAft>
+                <a:spcPts val="600"/>
+              </a:spcAft>
+            </a:pPr>
+            <a:r>
+              <a:rPr sz="1500">
+                <a:solidFill>
+                  <a:srgbClr val="22282E"/>
+                </a:solidFill>
+              </a:rPr>
+              <a:t>•  Detection-as-code: gestionar reglas como código versionado (Sigma en Git). Característica: revisión por pares, historial y reproducibilidad.</a:t>
+            </a:r>
+          </a:p>
+          <a:p>
+            <a:pPr>
+              <a:spcAft>
+                <a:spcPts val="600"/>
+              </a:spcAft>
+            </a:pPr>
+            <a:r>
+              <a:rPr sz="1500">
+                <a:solidFill>
+                  <a:srgbClr val="22282E"/>
+                </a:solidFill>
+              </a:rPr>
+              <a:t>•  CI/CD de detecciones: pipeline que valida sintaxis, convierte y prueba reglas automáticamente. Característica: previene reglas rotas en producción.</a:t>
+            </a:r>
+          </a:p>
+          <a:p>
+            <a:pPr>
+              <a:spcAft>
+                <a:spcPts val="600"/>
+              </a:spcAft>
+            </a:pPr>
+            <a:r>
+              <a:rPr sz="1500">
+                <a:solidFill>
+                  <a:srgbClr val="22282E"/>
+                </a:solidFill>
+              </a:rPr>
+              <a:t>•  Metadatos de detección: contexto de la regla (autor, ATT&amp;CK, falsos positivos, respuesta). Característica: acelera el triaje y el mantenimiento.</a:t>
+            </a:r>
+          </a:p>
+          <a:p>
+            <a:pPr>
+              <a:spcAft>
+                <a:spcPts val="600"/>
+              </a:spcAft>
+            </a:pPr>
+            <a:r>
+              <a:rPr sz="1500">
+                <a:solidFill>
+                  <a:srgbClr val="22282E"/>
+                </a:solidFill>
+              </a:rPr>
+              <a:t>•  Validación: ejecutar la técnica y comprobar que la regla dispara. Característica: distingue cobertura real de teórica.</a:t>
+            </a:r>
+          </a:p>
+          <a:p>
+            <a:pPr>
+              <a:spcAft>
+                <a:spcPts val="600"/>
+              </a:spcAft>
+            </a:pPr>
+            <a:r>
+              <a:rPr sz="1500">
+                <a:solidFill>
+                  <a:srgbClr val="22282E"/>
+                </a:solidFill>
+              </a:rPr>
+              <a:t>•  Deuda de detección: reglas obsoletas, ruidosas o sin dueño. Característica: degrada la señal si no se gestiona.</a:t>
+            </a:r>
+          </a:p>
+          <a:p>
+            <a:pPr>
+              <a:spcAft>
+                <a:spcPts val="600"/>
+              </a:spcAft>
+            </a:pPr>
+            <a:r>
+              <a:rPr sz="1500">
+                <a:solidFill>
+                  <a:srgbClr val="22282E"/>
+                </a:solidFill>
+              </a:rPr>
+              <a:t>•  Precisión de detección: proporción de alertas verdaderas sobre el total. Característica: mide la calidad, no la cantidad.</a:t>
             </a:r>
           </a:p>
         </p:txBody>
@@ -4614,7 +5305,7 @@
                   <a:srgbClr val="0B3D2E"/>
                 </a:solidFill>
               </a:rPr>
-              <a:t>✍️ Ejercicios</a:t>
+              <a:t>🔍 Producto completo — ciclo de una detección</a:t>
             </a:r>
           </a:p>
         </p:txBody>
@@ -4652,82 +5343,37 @@
                   <a:srgbClr val="22282E"/>
                 </a:solidFill>
               </a:rPr>
-              <a:t>•  Diseña la plantilla de metadatos de una detección completa.</a:t>
-            </a:r>
-          </a:p>
-          <a:p>
-            <a:pPr>
-              <a:spcAft>
-                <a:spcPts val="600"/>
-              </a:spcAft>
-            </a:pPr>
-            <a:r>
-              <a:rPr sz="1500">
-                <a:solidFill>
-                  <a:srgbClr val="22282E"/>
-                </a:solidFill>
-              </a:rPr>
-              <a:t>•  Escribe el pipeline de CI (pseudo-YAML) que valide y convierta reglas.</a:t>
-            </a:r>
-          </a:p>
-          <a:p>
-            <a:pPr>
-              <a:spcAft>
-                <a:spcPts val="600"/>
-              </a:spcAft>
-            </a:pPr>
-            <a:r>
-              <a:rPr sz="1500">
-                <a:solidFill>
-                  <a:srgbClr val="22282E"/>
-                </a:solidFill>
-              </a:rPr>
-              <a:t>•  Valida una detección con el test de Atomic Red Team adecuado.</a:t>
-            </a:r>
-          </a:p>
-          <a:p>
-            <a:pPr>
-              <a:spcAft>
-                <a:spcPts val="600"/>
-              </a:spcAft>
-            </a:pPr>
-            <a:r>
-              <a:rPr sz="1500">
-                <a:solidFill>
-                  <a:srgbClr val="22282E"/>
-                </a:solidFill>
-              </a:rPr>
-              <a:t>•  Define criterios objetivos para retirar una detección.</a:t>
-            </a:r>
-          </a:p>
-          <a:p>
-            <a:pPr>
-              <a:spcAft>
-                <a:spcPts val="600"/>
-              </a:spcAft>
-            </a:pPr>
-            <a:r>
-              <a:rPr sz="1500">
-                <a:solidFill>
-                  <a:srgbClr val="22282E"/>
-                </a:solidFill>
-              </a:rPr>
-              <a:t>•  Calcula la precisión de una regla con TP/FP de ejemplo.</a:t>
-            </a:r>
-          </a:p>
-          <a:p>
-            <a:pPr>
-              <a:spcAft>
-                <a:spcPts val="600"/>
-              </a:spcAft>
-            </a:pPr>
-            <a:r>
-              <a:rPr sz="1500">
-                <a:solidFill>
-                  <a:srgbClr val="22282E"/>
-                </a:solidFill>
-              </a:rPr>
-              <a:t>•  Explica cómo el versionado ayuda a auditar cambios de detección.</a:t>
+              <a:t>•  La historia de usuario defensiva define que el SOC necesita reconocer creación remota de servicios en servidores críticos. El contrato declara eventos, host, servicio, identidad, origen, proceso y…</a:t>
+            </a:r>
+          </a:p>
+          <a:p>
+            <a:pPr>
+              <a:spcAft>
+                <a:spcPts val="600"/>
+              </a:spcAft>
+            </a:pPr>
+            <a:r>
+              <a:rPr sz="1500">
+                <a:solidFill>
+                  <a:srgbClr val="22282E"/>
+                </a:solidFill>
+              </a:rPr>
+              <a:t>•  CI valida esquema y resultados. El despliegue inicia en modo observación, mide volumen y luego crea alertas para un grupo. En producción se vigilan último evento por fuente, coincidencias, campos…</a:t>
+            </a:r>
+          </a:p>
+          <a:p>
+            <a:pPr>
+              <a:spcAft>
+                <a:spcPts val="600"/>
+              </a:spcAft>
+            </a:pPr>
+            <a:r>
+              <a:rPr sz="1500">
+                <a:solidFill>
+                  <a:srgbClr val="22282E"/>
+                </a:solidFill>
+              </a:rPr>
+              <a:t>•  Meses después la plataforma migra y la regla es sustituida. Se retira con motivo, reemplazo y dependencias, manteniendo historial. El producto cubrió un ciclo completo, no solo el momento de…</a:t>
             </a:r>
           </a:p>
         </p:txBody>
@@ -4778,7 +5424,7 @@
                   <a:srgbClr val="0B3D2E"/>
                 </a:solidFill>
               </a:rPr>
-              <a:t>📝 Reto verificable</a:t>
+              <a:t>✅ Criterio de dominio</a:t>
             </a:r>
           </a:p>
         </p:txBody>
@@ -4816,7 +5462,7 @@
                   <a:srgbClr val="22282E"/>
                 </a:solidFill>
               </a:rPr>
-              <a:t>•  Entrega un mini repositorio de detección como código con al menos tres reglas documentadas, un pipeline que valida y convierte sintaxis, y la evidencia de que una de ellas fue validada con Atomic Red Team en tu laboratorio. Criterio de aceptación: el pipeline falla ante una regla con sintaxis inválida y pasa con las correctas, cada detección incluye metadatos y respuesta esperada, y demuestras que la técnica ejecutada con Atomic dispara la regla correspondiente en el SIEM.</a:t>
+              <a:t>•  El alumno entrega repositorio reproducible, contrato, pruebas, rollout, métricas y retiro. Una regla activa sin dueño, datos vigilados ni negativo conocido se considera deuda.</a:t>
             </a:r>
           </a:p>
         </p:txBody>
